--- a/PHD progression powerpoints/PHD Progression 14.pptx
+++ b/PHD progression powerpoints/PHD Progression 14.pptx
@@ -23,6 +23,7 @@
     <p:sldId id="271" r:id="rId17"/>
     <p:sldId id="272" r:id="rId18"/>
     <p:sldId id="273" r:id="rId19"/>
+    <p:sldId id="274" r:id="rId20"/>
   </p:sldIdLst>
   <p:sldSz cx="12192000" cy="6858000"/>
   <p:notesSz cx="6858000" cy="9144000"/>
@@ -121,7 +122,41 @@
       </a:defRPr>
     </a:lvl9pPr>
   </p:defaultTextStyle>
+  <p:extLst>
+    <p:ext uri="{EFAFB233-063F-42B5-8137-9DF3F51BA10A}">
+      <p15:sldGuideLst xmlns:p15="http://schemas.microsoft.com/office/powerpoint/2012/main"/>
+    </p:ext>
+  </p:extLst>
 </p:presentation>
+</file>
+
+<file path=ppt/changesInfos/changesInfo1.xml><?xml version="1.0" encoding="utf-8"?>
+<pc:chgInfo xmlns:a="http://schemas.openxmlformats.org/drawingml/2006/main" xmlns:r="http://schemas.openxmlformats.org/officeDocument/2006/relationships" xmlns:ac="http://schemas.microsoft.com/office/drawing/2013/main/command" xmlns:pc="http://schemas.microsoft.com/office/powerpoint/2013/main/command">
+  <pc:docChgLst>
+    <pc:chgData name="Olanrewaju, Emmanuel (Student)" userId="856d88a3-a0f5-4502-a208-88adfba07448" providerId="ADAL" clId="{D34ADB89-9553-4F7A-AB9F-7E09DCC0A1DE}"/>
+    <pc:docChg chg="addSld modSld sldOrd">
+      <pc:chgData name="Olanrewaju, Emmanuel (Student)" userId="856d88a3-a0f5-4502-a208-88adfba07448" providerId="ADAL" clId="{D34ADB89-9553-4F7A-AB9F-7E09DCC0A1DE}" dt="2026-03-31T10:16:46.310" v="59"/>
+      <pc:docMkLst>
+        <pc:docMk/>
+      </pc:docMkLst>
+      <pc:sldChg chg="modSp new mod ord">
+        <pc:chgData name="Olanrewaju, Emmanuel (Student)" userId="856d88a3-a0f5-4502-a208-88adfba07448" providerId="ADAL" clId="{D34ADB89-9553-4F7A-AB9F-7E09DCC0A1DE}" dt="2026-03-31T10:16:46.310" v="59"/>
+        <pc:sldMkLst>
+          <pc:docMk/>
+          <pc:sldMk cId="99639852" sldId="274"/>
+        </pc:sldMkLst>
+        <pc:spChg chg="mod">
+          <ac:chgData name="Olanrewaju, Emmanuel (Student)" userId="856d88a3-a0f5-4502-a208-88adfba07448" providerId="ADAL" clId="{D34ADB89-9553-4F7A-AB9F-7E09DCC0A1DE}" dt="2026-03-31T10:16:29.013" v="57" actId="20577"/>
+          <ac:spMkLst>
+            <pc:docMk/>
+            <pc:sldMk cId="99639852" sldId="274"/>
+            <ac:spMk id="3" creationId="{95172E49-C5D4-6A89-B41B-0C379021CB77}"/>
+          </ac:spMkLst>
+        </pc:spChg>
+      </pc:sldChg>
+    </pc:docChg>
+  </pc:docChgLst>
+</pc:chgInfo>
 </file>
 
 <file path=ppt/slideLayouts/slideLayout1.xml><?xml version="1.0" encoding="utf-8"?>
@@ -209,6 +244,13 @@
               <a:schemeClr val="lt1"/>
             </a:fontRef>
           </p:style>
+          <p:txBody>
+            <a:bodyPr/>
+            <a:lstStyle/>
+            <a:p>
+              <a:endParaRPr lang="en-GB"/>
+            </a:p>
+          </p:txBody>
         </p:sp>
         <p:sp>
           <p:nvSpPr>
@@ -273,6 +315,13 @@
               <a:noFill/>
             </a:ln>
           </p:spPr>
+          <p:txBody>
+            <a:bodyPr/>
+            <a:lstStyle/>
+            <a:p>
+              <a:endParaRPr lang="en-GB"/>
+            </a:p>
+          </p:txBody>
         </p:sp>
       </p:grpSp>
       <p:sp>
@@ -459,7 +508,7 @@
           <a:p>
             <a:fld id="{DAE2946B-5316-424A-A6B8-698FC549E698}" type="datetimeFigureOut">
               <a:rPr lang="en-GB" smtClean="0"/>
-              <a:t>29/03/2026</a:t>
+              <a:t>31/03/2026</a:t>
             </a:fld>
             <a:endParaRPr lang="en-GB"/>
           </a:p>
@@ -534,6 +583,13 @@
             <a:schemeClr val="lt1"/>
           </a:fontRef>
         </p:style>
+        <p:txBody>
+          <a:bodyPr/>
+          <a:lstStyle/>
+          <a:p>
+            <a:endParaRPr lang="en-GB"/>
+          </a:p>
+        </p:txBody>
       </p:sp>
       <p:sp>
         <p:nvSpPr>
@@ -1547,7 +1603,7 @@
           <a:p>
             <a:fld id="{DAE2946B-5316-424A-A6B8-698FC549E698}" type="datetimeFigureOut">
               <a:rPr lang="en-GB" smtClean="0"/>
-              <a:t>29/03/2026</a:t>
+              <a:t>31/03/2026</a:t>
             </a:fld>
             <a:endParaRPr lang="en-GB"/>
           </a:p>
@@ -2527,7 +2583,7 @@
           <a:p>
             <a:fld id="{DAE2946B-5316-424A-A6B8-698FC549E698}" type="datetimeFigureOut">
               <a:rPr lang="en-GB" smtClean="0"/>
-              <a:t>29/03/2026</a:t>
+              <a:t>31/03/2026</a:t>
             </a:fld>
             <a:endParaRPr lang="en-GB"/>
           </a:p>
@@ -3661,7 +3717,7 @@
           <a:p>
             <a:fld id="{DAE2946B-5316-424A-A6B8-698FC549E698}" type="datetimeFigureOut">
               <a:rPr lang="en-GB" smtClean="0"/>
-              <a:t>29/03/2026</a:t>
+              <a:t>31/03/2026</a:t>
             </a:fld>
             <a:endParaRPr lang="en-GB"/>
           </a:p>
@@ -4694,7 +4750,7 @@
           <a:p>
             <a:fld id="{DAE2946B-5316-424A-A6B8-698FC549E698}" type="datetimeFigureOut">
               <a:rPr lang="en-GB" smtClean="0"/>
-              <a:t>29/03/2026</a:t>
+              <a:t>31/03/2026</a:t>
             </a:fld>
             <a:endParaRPr lang="en-GB"/>
           </a:p>
@@ -5354,7 +5410,7 @@
           <a:p>
             <a:fld id="{DAE2946B-5316-424A-A6B8-698FC549E698}" type="datetimeFigureOut">
               <a:rPr lang="en-GB" smtClean="0"/>
-              <a:t>29/03/2026</a:t>
+              <a:t>31/03/2026</a:t>
             </a:fld>
             <a:endParaRPr lang="en-GB"/>
           </a:p>
@@ -6215,7 +6271,7 @@
           <a:p>
             <a:fld id="{DAE2946B-5316-424A-A6B8-698FC549E698}" type="datetimeFigureOut">
               <a:rPr lang="en-GB" smtClean="0"/>
-              <a:t>29/03/2026</a:t>
+              <a:t>31/03/2026</a:t>
             </a:fld>
             <a:endParaRPr lang="en-GB"/>
           </a:p>
@@ -6405,7 +6461,7 @@
           <a:p>
             <a:fld id="{DAE2946B-5316-424A-A6B8-698FC549E698}" type="datetimeFigureOut">
               <a:rPr lang="en-GB" smtClean="0"/>
-              <a:t>29/03/2026</a:t>
+              <a:t>31/03/2026</a:t>
             </a:fld>
             <a:endParaRPr lang="en-GB"/>
           </a:p>
@@ -7377,7 +7433,7 @@
           <a:p>
             <a:fld id="{DAE2946B-5316-424A-A6B8-698FC549E698}" type="datetimeFigureOut">
               <a:rPr lang="en-GB" smtClean="0"/>
-              <a:t>29/03/2026</a:t>
+              <a:t>31/03/2026</a:t>
             </a:fld>
             <a:endParaRPr lang="en-GB"/>
           </a:p>
@@ -7588,7 +7644,7 @@
           <a:p>
             <a:fld id="{DAE2946B-5316-424A-A6B8-698FC549E698}" type="datetimeFigureOut">
               <a:rPr lang="en-GB" smtClean="0"/>
-              <a:t>29/03/2026</a:t>
+              <a:t>31/03/2026</a:t>
             </a:fld>
             <a:endParaRPr lang="en-GB"/>
           </a:p>
@@ -8622,7 +8678,7 @@
           <a:p>
             <a:fld id="{DAE2946B-5316-424A-A6B8-698FC549E698}" type="datetimeFigureOut">
               <a:rPr lang="en-GB" smtClean="0"/>
-              <a:t>29/03/2026</a:t>
+              <a:t>31/03/2026</a:t>
             </a:fld>
             <a:endParaRPr lang="en-GB"/>
           </a:p>
@@ -8894,7 +8950,7 @@
           <a:p>
             <a:fld id="{DAE2946B-5316-424A-A6B8-698FC549E698}" type="datetimeFigureOut">
               <a:rPr lang="en-GB" smtClean="0"/>
-              <a:t>29/03/2026</a:t>
+              <a:t>31/03/2026</a:t>
             </a:fld>
             <a:endParaRPr lang="en-GB"/>
           </a:p>
@@ -9304,7 +9360,7 @@
           <a:p>
             <a:fld id="{DAE2946B-5316-424A-A6B8-698FC549E698}" type="datetimeFigureOut">
               <a:rPr lang="en-GB" smtClean="0"/>
-              <a:t>29/03/2026</a:t>
+              <a:t>31/03/2026</a:t>
             </a:fld>
             <a:endParaRPr lang="en-GB"/>
           </a:p>
@@ -9431,7 +9487,7 @@
           <a:p>
             <a:fld id="{DAE2946B-5316-424A-A6B8-698FC549E698}" type="datetimeFigureOut">
               <a:rPr lang="en-GB" smtClean="0"/>
-              <a:t>29/03/2026</a:t>
+              <a:t>31/03/2026</a:t>
             </a:fld>
             <a:endParaRPr lang="en-GB"/>
           </a:p>
@@ -9526,7 +9582,7 @@
           <a:p>
             <a:fld id="{DAE2946B-5316-424A-A6B8-698FC549E698}" type="datetimeFigureOut">
               <a:rPr lang="en-GB" smtClean="0"/>
-              <a:t>29/03/2026</a:t>
+              <a:t>31/03/2026</a:t>
             </a:fld>
             <a:endParaRPr lang="en-GB"/>
           </a:p>
@@ -10607,7 +10663,7 @@
           <a:p>
             <a:fld id="{DAE2946B-5316-424A-A6B8-698FC549E698}" type="datetimeFigureOut">
               <a:rPr lang="en-GB" smtClean="0"/>
-              <a:t>29/03/2026</a:t>
+              <a:t>31/03/2026</a:t>
             </a:fld>
             <a:endParaRPr lang="en-GB"/>
           </a:p>
@@ -11715,7 +11771,7 @@
           <a:p>
             <a:fld id="{DAE2946B-5316-424A-A6B8-698FC549E698}" type="datetimeFigureOut">
               <a:rPr lang="en-GB" smtClean="0"/>
-              <a:t>29/03/2026</a:t>
+              <a:t>31/03/2026</a:t>
             </a:fld>
             <a:endParaRPr lang="en-GB"/>
           </a:p>
@@ -11902,6 +11958,13 @@
               <a:schemeClr val="lt1"/>
             </a:fontRef>
           </p:style>
+          <p:txBody>
+            <a:bodyPr/>
+            <a:lstStyle/>
+            <a:p>
+              <a:endParaRPr lang="en-GB"/>
+            </a:p>
+          </p:txBody>
         </p:sp>
         <p:sp>
           <p:nvSpPr>
@@ -11959,6 +12022,13 @@
               <a:schemeClr val="lt1"/>
             </a:fontRef>
           </p:style>
+          <p:txBody>
+            <a:bodyPr/>
+            <a:lstStyle/>
+            <a:p>
+              <a:endParaRPr lang="en-GB"/>
+            </a:p>
+          </p:txBody>
         </p:sp>
         <p:sp>
           <p:nvSpPr>
@@ -12016,6 +12086,13 @@
               <a:schemeClr val="lt1"/>
             </a:fontRef>
           </p:style>
+          <p:txBody>
+            <a:bodyPr/>
+            <a:lstStyle/>
+            <a:p>
+              <a:endParaRPr lang="en-GB"/>
+            </a:p>
+          </p:txBody>
         </p:sp>
         <p:sp>
           <p:nvSpPr>
@@ -12073,6 +12150,13 @@
               <a:schemeClr val="lt1"/>
             </a:fontRef>
           </p:style>
+          <p:txBody>
+            <a:bodyPr/>
+            <a:lstStyle/>
+            <a:p>
+              <a:endParaRPr lang="en-GB"/>
+            </a:p>
+          </p:txBody>
         </p:sp>
         <p:sp>
           <p:nvSpPr>
@@ -12130,6 +12214,13 @@
               <a:schemeClr val="lt1"/>
             </a:fontRef>
           </p:style>
+          <p:txBody>
+            <a:bodyPr/>
+            <a:lstStyle/>
+            <a:p>
+              <a:endParaRPr lang="en-GB"/>
+            </a:p>
+          </p:txBody>
         </p:sp>
         <p:sp>
           <p:nvSpPr>
@@ -12187,6 +12278,13 @@
               <a:schemeClr val="lt1"/>
             </a:fontRef>
           </p:style>
+          <p:txBody>
+            <a:bodyPr/>
+            <a:lstStyle/>
+            <a:p>
+              <a:endParaRPr lang="en-GB"/>
+            </a:p>
+          </p:txBody>
         </p:sp>
         <p:sp>
           <p:nvSpPr>
@@ -12334,6 +12432,13 @@
               <a:noFill/>
             </a:ln>
           </p:spPr>
+          <p:txBody>
+            <a:bodyPr/>
+            <a:lstStyle/>
+            <a:p>
+              <a:endParaRPr lang="en-GB"/>
+            </a:p>
+          </p:txBody>
         </p:sp>
         <p:sp>
           <p:nvSpPr>
@@ -12518,6 +12623,13 @@
               <a:noFill/>
             </a:ln>
           </p:spPr>
+          <p:txBody>
+            <a:bodyPr/>
+            <a:lstStyle/>
+            <a:p>
+              <a:endParaRPr lang="en-GB"/>
+            </a:p>
+          </p:txBody>
         </p:sp>
         <p:sp>
           <p:nvSpPr>
@@ -12582,6 +12694,13 @@
               <a:noFill/>
             </a:ln>
           </p:spPr>
+          <p:txBody>
+            <a:bodyPr/>
+            <a:lstStyle/>
+            <a:p>
+              <a:endParaRPr lang="en-GB"/>
+            </a:p>
+          </p:txBody>
         </p:sp>
       </p:grpSp>
       <p:sp>
@@ -12712,7 +12831,7 @@
           <a:p>
             <a:fld id="{DAE2946B-5316-424A-A6B8-698FC549E698}" type="datetimeFigureOut">
               <a:rPr lang="en-GB" smtClean="0"/>
-              <a:t>29/03/2026</a:t>
+              <a:t>31/03/2026</a:t>
             </a:fld>
             <a:endParaRPr lang="en-GB"/>
           </a:p>
@@ -12788,6 +12907,13 @@
             <a:schemeClr val="lt1"/>
           </a:fontRef>
         </p:style>
+        <p:txBody>
+          <a:bodyPr/>
+          <a:lstStyle/>
+          <a:p>
+            <a:endParaRPr lang="en-GB"/>
+          </a:p>
+        </p:txBody>
       </p:sp>
       <p:sp>
         <p:nvSpPr>
@@ -18779,6 +18905,89 @@
     <p:extLst>
       <p:ext uri="{BB962C8B-B14F-4D97-AF65-F5344CB8AC3E}">
         <p14:creationId xmlns:p14="http://schemas.microsoft.com/office/powerpoint/2010/main" val="3698338573"/>
+      </p:ext>
+    </p:extLst>
+  </p:cSld>
+  <p:clrMapOvr>
+    <a:masterClrMapping/>
+  </p:clrMapOvr>
+</p:sld>
+</file>
+
+<file path=ppt/slides/slide19.xml><?xml version="1.0" encoding="utf-8"?>
+<p:sld xmlns:a="http://schemas.openxmlformats.org/drawingml/2006/main" xmlns:r="http://schemas.openxmlformats.org/officeDocument/2006/relationships" xmlns:p="http://schemas.openxmlformats.org/presentationml/2006/main">
+  <p:cSld>
+    <p:spTree>
+      <p:nvGrpSpPr>
+        <p:cNvPr id="1" name=""/>
+        <p:cNvGrpSpPr/>
+        <p:nvPr/>
+      </p:nvGrpSpPr>
+      <p:grpSpPr>
+        <a:xfrm>
+          <a:off x="0" y="0"/>
+          <a:ext cx="0" cy="0"/>
+          <a:chOff x="0" y="0"/>
+          <a:chExt cx="0" cy="0"/>
+        </a:xfrm>
+      </p:grpSpPr>
+      <p:sp>
+        <p:nvSpPr>
+          <p:cNvPr id="2" name="Title 1">
+            <a:extLst>
+              <a:ext uri="{FF2B5EF4-FFF2-40B4-BE49-F238E27FC236}">
+                <a16:creationId xmlns:a16="http://schemas.microsoft.com/office/drawing/2014/main" id="{103B2F6D-38CC-B367-AE38-4CCA36D78BF5}"/>
+              </a:ext>
+            </a:extLst>
+          </p:cNvPr>
+          <p:cNvSpPr>
+            <a:spLocks noGrp="1"/>
+          </p:cNvSpPr>
+          <p:nvPr>
+            <p:ph type="title"/>
+          </p:nvPr>
+        </p:nvSpPr>
+        <p:spPr/>
+        <p:txBody>
+          <a:bodyPr/>
+          <a:lstStyle/>
+          <a:p>
+            <a:endParaRPr lang="en-GB"/>
+          </a:p>
+        </p:txBody>
+      </p:sp>
+      <p:sp>
+        <p:nvSpPr>
+          <p:cNvPr id="3" name="Content Placeholder 2">
+            <a:extLst>
+              <a:ext uri="{FF2B5EF4-FFF2-40B4-BE49-F238E27FC236}">
+                <a16:creationId xmlns:a16="http://schemas.microsoft.com/office/drawing/2014/main" id="{95172E49-C5D4-6A89-B41B-0C379021CB77}"/>
+              </a:ext>
+            </a:extLst>
+          </p:cNvPr>
+          <p:cNvSpPr>
+            <a:spLocks noGrp="1"/>
+          </p:cNvSpPr>
+          <p:nvPr>
+            <p:ph idx="1"/>
+          </p:nvPr>
+        </p:nvSpPr>
+        <p:spPr/>
+        <p:txBody>
+          <a:bodyPr/>
+          <a:lstStyle/>
+          <a:p>
+            <a:r>
+              <a:rPr lang="en-GB" dirty="0"/>
+              <a:t>The more tokens we have, the less information PCA keeps</a:t>
+            </a:r>
+          </a:p>
+        </p:txBody>
+      </p:sp>
+    </p:spTree>
+    <p:extLst>
+      <p:ext uri="{BB962C8B-B14F-4D97-AF65-F5344CB8AC3E}">
+        <p14:creationId xmlns:p14="http://schemas.microsoft.com/office/powerpoint/2010/main" val="99639852"/>
       </p:ext>
     </p:extLst>
   </p:cSld>
